--- a/docs/RMSignal-submission.pptx
+++ b/docs/RMSignal-submission.pptx
@@ -8,7 +8,7 @@
     <p:notesMasterId r:id="rId14"/>
   </p:notesMasterIdLst>
   <p:sldIdLst>
-    <p:sldId id="256" r:id="rId2"/>
+    <p:sldId id="272" r:id="rId2"/>
     <p:sldId id="258" r:id="rId3"/>
     <p:sldId id="259" r:id="rId4"/>
     <p:sldId id="260" r:id="rId5"/>
@@ -734,7 +734,13 @@
   <p:cSld>
     <p:spTree>
       <p:nvGrpSpPr>
-        <p:cNvPr id="1" name="Shape 50"/>
+        <p:cNvPr id="1" name="Shape 50">
+          <a:extLst>
+            <a:ext uri="{FF2B5EF4-FFF2-40B4-BE49-F238E27FC236}">
+              <a16:creationId xmlns:a16="http://schemas.microsoft.com/office/drawing/2014/main" id="{9FECCF51-7547-2BAF-B7D8-40CB6895641C}"/>
+            </a:ext>
+          </a:extLst>
+        </p:cNvPr>
         <p:cNvGrpSpPr/>
         <p:nvPr/>
       </p:nvGrpSpPr>
@@ -748,7 +754,13 @@
       </p:grpSpPr>
       <p:sp>
         <p:nvSpPr>
-          <p:cNvPr id="51" name="Google Shape;51;p:notes"/>
+          <p:cNvPr id="51" name="Google Shape;51;p:notes">
+            <a:extLst>
+              <a:ext uri="{FF2B5EF4-FFF2-40B4-BE49-F238E27FC236}">
+                <a16:creationId xmlns:a16="http://schemas.microsoft.com/office/drawing/2014/main" id="{B0F912F7-7B36-A641-A736-40C8F1DB08B9}"/>
+              </a:ext>
+            </a:extLst>
+          </p:cNvPr>
           <p:cNvSpPr>
             <a:spLocks noGrp="1" noRot="1" noChangeAspect="1"/>
           </p:cNvSpPr>
@@ -789,7 +801,13 @@
       </p:sp>
       <p:sp>
         <p:nvSpPr>
-          <p:cNvPr id="52" name="Google Shape;52;p:notes"/>
+          <p:cNvPr id="52" name="Google Shape;52;p:notes">
+            <a:extLst>
+              <a:ext uri="{FF2B5EF4-FFF2-40B4-BE49-F238E27FC236}">
+                <a16:creationId xmlns:a16="http://schemas.microsoft.com/office/drawing/2014/main" id="{31F46B64-8EE8-50DE-9826-1813F314C958}"/>
+              </a:ext>
+            </a:extLst>
+          </p:cNvPr>
           <p:cNvSpPr txBox="1">
             <a:spLocks noGrp="1"/>
           </p:cNvSpPr>
@@ -826,6 +844,11 @@
         </p:txBody>
       </p:sp>
     </p:spTree>
+    <p:extLst>
+      <p:ext uri="{BB962C8B-B14F-4D97-AF65-F5344CB8AC3E}">
+        <p14:creationId xmlns:p14="http://schemas.microsoft.com/office/powerpoint/2010/main" val="3306393912"/>
+      </p:ext>
+    </p:extLst>
   </p:cSld>
   <p:clrMapOvr>
     <a:masterClrMapping/>
@@ -966,7 +989,7 @@
         </p:nvSpPr>
         <p:spPr>
           <a:xfrm>
-            <a:off x="381300" y="685800"/>
+            <a:off x="381000" y="685800"/>
             <a:ext cx="6096000" cy="3429000"/>
           </a:xfrm>
           <a:custGeom>
@@ -1174,7 +1197,7 @@
         </p:nvSpPr>
         <p:spPr>
           <a:xfrm>
-            <a:off x="381300" y="685800"/>
+            <a:off x="381000" y="685800"/>
             <a:ext cx="6096000" cy="3429000"/>
           </a:xfrm>
           <a:custGeom>
@@ -1590,7 +1613,7 @@
         </p:nvSpPr>
         <p:spPr>
           <a:xfrm>
-            <a:off x="381300" y="685800"/>
+            <a:off x="381000" y="685800"/>
             <a:ext cx="6096000" cy="3429000"/>
           </a:xfrm>
           <a:custGeom>
@@ -1694,7 +1717,7 @@
         </p:nvSpPr>
         <p:spPr>
           <a:xfrm>
-            <a:off x="381300" y="685800"/>
+            <a:off x="381000" y="685800"/>
             <a:ext cx="6096000" cy="3429000"/>
           </a:xfrm>
           <a:custGeom>
@@ -1902,7 +1925,7 @@
         </p:nvSpPr>
         <p:spPr>
           <a:xfrm>
-            <a:off x="381300" y="685800"/>
+            <a:off x="381000" y="685800"/>
             <a:ext cx="6096000" cy="3429000"/>
           </a:xfrm>
           <a:custGeom>
@@ -6731,7 +6754,13 @@
   <p:cSld>
     <p:spTree>
       <p:nvGrpSpPr>
-        <p:cNvPr id="1" name="Shape 53"/>
+        <p:cNvPr id="1" name="Shape 53">
+          <a:extLst>
+            <a:ext uri="{FF2B5EF4-FFF2-40B4-BE49-F238E27FC236}">
+              <a16:creationId xmlns:a16="http://schemas.microsoft.com/office/drawing/2014/main" id="{FA840C03-2580-1AB5-F0E7-A7B15C82FA59}"/>
+            </a:ext>
+          </a:extLst>
+        </p:cNvPr>
         <p:cNvGrpSpPr/>
         <p:nvPr/>
       </p:nvGrpSpPr>
@@ -6745,7 +6774,13 @@
       </p:grpSpPr>
       <p:sp>
         <p:nvSpPr>
-          <p:cNvPr id="54" name="Google Shape;54;p13"/>
+          <p:cNvPr id="54" name="Google Shape;54;p13">
+            <a:extLst>
+              <a:ext uri="{FF2B5EF4-FFF2-40B4-BE49-F238E27FC236}">
+                <a16:creationId xmlns:a16="http://schemas.microsoft.com/office/drawing/2014/main" id="{788A2823-C714-5AD8-3474-BF8F122D3D46}"/>
+              </a:ext>
+            </a:extLst>
+          </p:cNvPr>
           <p:cNvSpPr txBox="1"/>
           <p:nvPr/>
         </p:nvSpPr>
@@ -6794,6 +6829,24 @@
                 <a:sym typeface="Google Sans Flex SemiBold"/>
               </a:rPr>
               <a:t>Webmobix</a:t>
+            </a:r>
+            <a:r>
+              <a:rPr lang="en-GB" sz="2100" dirty="0">
+                <a:latin typeface="Google Sans Flex SemiBold"/>
+                <a:ea typeface="Google Sans Flex SemiBold"/>
+                <a:cs typeface="Google Sans Flex SemiBold"/>
+                <a:sym typeface="Google Sans Flex SemiBold"/>
+              </a:rPr>
+              <a:t> - </a:t>
+            </a:r>
+            <a:r>
+              <a:rPr lang="en-GB" sz="2100" dirty="0" err="1">
+                <a:latin typeface="Google Sans Flex SemiBold"/>
+                <a:ea typeface="Google Sans Flex SemiBold"/>
+                <a:cs typeface="Google Sans Flex SemiBold"/>
+                <a:sym typeface="Google Sans Flex SemiBold"/>
+              </a:rPr>
+              <a:t>RMSignal</a:t>
             </a:r>
             <a:endParaRPr lang="en-GB" sz="2100" dirty="0">
               <a:latin typeface="Google Sans Flex SemiBold"/>
@@ -6830,31 +6883,13 @@
               <a:buNone/>
             </a:pPr>
             <a:r>
-              <a:rPr lang="en-GB" sz="1800" dirty="0" err="1">
-                <a:latin typeface="Google Sans Flex"/>
-                <a:ea typeface="Google Sans Flex"/>
-                <a:cs typeface="Google Sans Flex"/>
-                <a:sym typeface="Google Sans Flex"/>
-              </a:rPr>
-              <a:t>RMSignal</a:t>
-            </a:r>
-            <a:r>
-              <a:rPr lang="en-GB" sz="1800">
-                <a:latin typeface="Google Sans Flex"/>
-                <a:ea typeface="Google Sans Flex"/>
-                <a:cs typeface="Google Sans Flex"/>
-                <a:sym typeface="Google Sans Flex"/>
-              </a:rPr>
-              <a:t> - Wealth </a:t>
-            </a:r>
-            <a:r>
               <a:rPr lang="en-GB" sz="1800" dirty="0">
                 <a:latin typeface="Google Sans Flex"/>
                 <a:ea typeface="Google Sans Flex"/>
                 <a:cs typeface="Google Sans Flex"/>
                 <a:sym typeface="Google Sans Flex"/>
               </a:rPr>
-              <a:t>Management Intelligence. </a:t>
+              <a:t>Wealth Management Intelligence. </a:t>
             </a:r>
           </a:p>
           <a:p>
@@ -6876,15 +6911,9 @@
               </a:rPr>
               <a:t>Move from portfolio monitoring to proactive, explainable advice for Relationship Managers.</a:t>
             </a:r>
-            <a:endParaRPr sz="1800" dirty="0">
-              <a:latin typeface="Google Sans Flex"/>
-              <a:ea typeface="Google Sans Flex"/>
-              <a:cs typeface="Google Sans Flex"/>
-              <a:sym typeface="Google Sans Flex"/>
-            </a:endParaRPr>
-          </a:p>
-          <a:p>
-            <a:endParaRPr sz="1800" dirty="0">
+          </a:p>
+          <a:p>
+            <a:endParaRPr lang="en-GB" sz="1800" dirty="0">
               <a:latin typeface="Google Sans Flex Medium"/>
               <a:ea typeface="Google Sans Flex Medium"/>
               <a:cs typeface="Google Sans Flex Medium"/>
@@ -6895,7 +6924,13 @@
       </p:sp>
       <p:pic>
         <p:nvPicPr>
-          <p:cNvPr id="55" name="Google Shape;55;p13" title="Frame 144.png"/>
+          <p:cNvPr id="55" name="Google Shape;55;p13" title="Frame 144.png">
+            <a:extLst>
+              <a:ext uri="{FF2B5EF4-FFF2-40B4-BE49-F238E27FC236}">
+                <a16:creationId xmlns:a16="http://schemas.microsoft.com/office/drawing/2014/main" id="{B4719D5C-FEEF-A251-980F-EB75A76A4821}"/>
+              </a:ext>
+            </a:extLst>
+          </p:cNvPr>
           <p:cNvPicPr preferRelativeResize="0"/>
           <p:nvPr/>
         </p:nvPicPr>
@@ -6923,7 +6958,13 @@
       </p:pic>
       <p:pic>
         <p:nvPicPr>
-          <p:cNvPr id="56" name="Google Shape;56;p13" title="Frame 144.png"/>
+          <p:cNvPr id="56" name="Google Shape;56;p13" title="Frame 144.png">
+            <a:extLst>
+              <a:ext uri="{FF2B5EF4-FFF2-40B4-BE49-F238E27FC236}">
+                <a16:creationId xmlns:a16="http://schemas.microsoft.com/office/drawing/2014/main" id="{6C1C05C8-FE43-79AA-B555-8C451C8BE19D}"/>
+              </a:ext>
+            </a:extLst>
+          </p:cNvPr>
           <p:cNvPicPr preferRelativeResize="0"/>
           <p:nvPr/>
         </p:nvPicPr>
@@ -6949,6 +6990,11 @@
         </p:spPr>
       </p:pic>
     </p:spTree>
+    <p:extLst>
+      <p:ext uri="{BB962C8B-B14F-4D97-AF65-F5344CB8AC3E}">
+        <p14:creationId xmlns:p14="http://schemas.microsoft.com/office/powerpoint/2010/main" val="1982757937"/>
+      </p:ext>
+    </p:extLst>
   </p:cSld>
   <p:clrMapOvr>
     <a:masterClrMapping/>
@@ -7701,15 +7747,6 @@
             </a:r>
           </a:p>
           <a:p>
-            <a:pPr marL="0" indent="0" algn="l">
-              <a:spcBef>
-                <a:spcPts val="0"/>
-              </a:spcBef>
-              <a:spcAft>
-                <a:spcPts val="0"/>
-              </a:spcAft>
-              <a:buNone/>
-            </a:pPr>
             <a:r>
               <a:rPr lang="en-GB" sz="1200" i="1" dirty="0">
                 <a:solidFill>
@@ -7719,9 +7756,84 @@
                 <a:ea typeface="Google Sans Flex"/>
                 <a:cs typeface="Google Sans Flex"/>
                 <a:sym typeface="Google Sans Flex"/>
-              </a:rPr>
-              <a:t>[add link before submitting]</a:t>
-            </a:r>
+                <a:hlinkClick r:id="rId5"/>
+              </a:rPr>
+              <a:t>https://</a:t>
+            </a:r>
+            <a:r>
+              <a:rPr lang="en-GB" sz="1200" i="1" dirty="0" err="1">
+                <a:solidFill>
+                  <a:srgbClr val="5F6368"/>
+                </a:solidFill>
+                <a:latin typeface="Google Sans Flex"/>
+                <a:ea typeface="Google Sans Flex"/>
+                <a:cs typeface="Google Sans Flex"/>
+                <a:sym typeface="Google Sans Flex"/>
+                <a:hlinkClick r:id="rId5"/>
+              </a:rPr>
+              <a:t>github.com</a:t>
+            </a:r>
+            <a:r>
+              <a:rPr lang="en-GB" sz="1200" i="1" dirty="0">
+                <a:solidFill>
+                  <a:srgbClr val="5F6368"/>
+                </a:solidFill>
+                <a:latin typeface="Google Sans Flex"/>
+                <a:ea typeface="Google Sans Flex"/>
+                <a:cs typeface="Google Sans Flex"/>
+                <a:sym typeface="Google Sans Flex"/>
+                <a:hlinkClick r:id="rId5"/>
+              </a:rPr>
+              <a:t>/</a:t>
+            </a:r>
+            <a:r>
+              <a:rPr lang="en-GB" sz="1200" i="1" dirty="0" err="1">
+                <a:solidFill>
+                  <a:srgbClr val="5F6368"/>
+                </a:solidFill>
+                <a:latin typeface="Google Sans Flex"/>
+                <a:ea typeface="Google Sans Flex"/>
+                <a:cs typeface="Google Sans Flex"/>
+                <a:sym typeface="Google Sans Flex"/>
+                <a:hlinkClick r:id="rId5"/>
+              </a:rPr>
+              <a:t>webmobix</a:t>
+            </a:r>
+            <a:r>
+              <a:rPr lang="en-GB" sz="1200" i="1" dirty="0">
+                <a:solidFill>
+                  <a:srgbClr val="5F6368"/>
+                </a:solidFill>
+                <a:latin typeface="Google Sans Flex"/>
+                <a:ea typeface="Google Sans Flex"/>
+                <a:cs typeface="Google Sans Flex"/>
+                <a:sym typeface="Google Sans Flex"/>
+                <a:hlinkClick r:id="rId5"/>
+              </a:rPr>
+              <a:t>/</a:t>
+            </a:r>
+            <a:r>
+              <a:rPr lang="en-GB" sz="1200" i="1" dirty="0" err="1">
+                <a:solidFill>
+                  <a:srgbClr val="5F6368"/>
+                </a:solidFill>
+                <a:latin typeface="Google Sans Flex"/>
+                <a:ea typeface="Google Sans Flex"/>
+                <a:cs typeface="Google Sans Flex"/>
+                <a:sym typeface="Google Sans Flex"/>
+                <a:hlinkClick r:id="rId5"/>
+              </a:rPr>
+              <a:t>rmsignal</a:t>
+            </a:r>
+            <a:endParaRPr lang="en-GB" sz="1200" i="1" dirty="0">
+              <a:solidFill>
+                <a:srgbClr val="5F6368"/>
+              </a:solidFill>
+              <a:latin typeface="Google Sans Flex"/>
+              <a:ea typeface="Google Sans Flex"/>
+              <a:cs typeface="Google Sans Flex"/>
+              <a:sym typeface="Google Sans Flex"/>
+            </a:endParaRPr>
           </a:p>
         </p:txBody>
       </p:sp>
@@ -7853,15 +7965,6 @@
             </a:r>
           </a:p>
           <a:p>
-            <a:pPr marL="0" indent="0" algn="l">
-              <a:spcBef>
-                <a:spcPts val="0"/>
-              </a:spcBef>
-              <a:spcAft>
-                <a:spcPts val="0"/>
-              </a:spcAft>
-              <a:buNone/>
-            </a:pPr>
             <a:r>
               <a:rPr lang="en-GB" sz="1200" i="1" dirty="0">
                 <a:solidFill>
@@ -7871,9 +7974,19 @@
                 <a:ea typeface="Google Sans Flex"/>
                 <a:cs typeface="Google Sans Flex"/>
                 <a:sym typeface="Google Sans Flex"/>
-              </a:rPr>
-              <a:t>[add link before submitting]</a:t>
-            </a:r>
+                <a:hlinkClick r:id="rId6"/>
+              </a:rPr>
+              <a:t>https://rm-dashboard-spa-820913152799.asia-southeast3.run.app/</a:t>
+            </a:r>
+            <a:endParaRPr lang="en-GB" sz="1200" i="1" dirty="0">
+              <a:solidFill>
+                <a:srgbClr val="5F6368"/>
+              </a:solidFill>
+              <a:latin typeface="Google Sans Flex"/>
+              <a:ea typeface="Google Sans Flex"/>
+              <a:cs typeface="Google Sans Flex"/>
+              <a:sym typeface="Google Sans Flex"/>
+            </a:endParaRPr>
           </a:p>
         </p:txBody>
       </p:sp>
@@ -8099,7 +8212,7 @@
         <p:spPr>
           <a:xfrm>
             <a:off x="356616" y="1097280"/>
-            <a:ext cx="5029200" cy="3657600"/>
+            <a:ext cx="7435662" cy="3657600"/>
           </a:xfrm>
           <a:prstGeom prst="rect">
             <a:avLst/>
@@ -8180,21 +8293,10 @@
                 <a:cs typeface="Google Sans Flex"/>
                 <a:sym typeface="Google Sans Flex"/>
               </a:rPr>
-              <a:t>What RMSignal does</a:t>
-            </a:r>
-          </a:p>
-          <a:p>
-            <a:pPr marL="0" indent="0" algn="l">
-              <a:spcBef>
-                <a:spcPts val="0"/>
-              </a:spcBef>
-              <a:spcAft>
-                <a:spcPts val="1000"/>
-              </a:spcAft>
-              <a:buNone/>
-            </a:pPr>
-            <a:r>
-              <a:rPr lang="en-GB" sz="1300" dirty="0">
+              <a:t>What </a:t>
+            </a:r>
+            <a:r>
+              <a:rPr lang="en-GB" sz="1400" b="1" dirty="0" err="1">
                 <a:solidFill>
                   <a:srgbClr val="1F1F1F"/>
                 </a:solidFill>
@@ -8203,19 +8305,8 @@
                 <a:cs typeface="Google Sans Flex"/>
                 <a:sym typeface="Google Sans Flex"/>
               </a:rPr>
-              <a:t>It reads portfolios, mandates, market events and the RM's own notes. It gives back a ranked list of next actions: who to call, what to say and the proof behind it.</a:t>
-            </a:r>
-          </a:p>
-          <a:p>
-            <a:pPr marL="0" indent="0" algn="l">
-              <a:spcBef>
-                <a:spcPts val="0"/>
-              </a:spcBef>
-              <a:spcAft>
-                <a:spcPts val="300"/>
-              </a:spcAft>
-              <a:buNone/>
-            </a:pPr>
+              <a:t>RMSignal</a:t>
+            </a:r>
             <a:r>
               <a:rPr lang="en-GB" sz="1400" b="1" dirty="0">
                 <a:solidFill>
@@ -8226,7 +8317,7 @@
                 <a:cs typeface="Google Sans Flex"/>
                 <a:sym typeface="Google Sans Flex"/>
               </a:rPr>
-              <a:t>Who stays in charge</a:t>
+              <a:t> does</a:t>
             </a:r>
           </a:p>
           <a:p>
@@ -8235,7 +8326,7 @@
                 <a:spcPts val="0"/>
               </a:spcBef>
               <a:spcAft>
-                <a:spcPts val="0"/>
+                <a:spcPts val="1000"/>
               </a:spcAft>
               <a:buNone/>
             </a:pPr>
@@ -8249,60 +8340,30 @@
                 <a:cs typeface="Google Sans Flex"/>
                 <a:sym typeface="Google Sans Flex"/>
               </a:rPr>
-              <a:t>The RM. She can inspect, question and overrule everything. The AI suggests. She decides.</a:t>
-            </a:r>
-          </a:p>
-        </p:txBody>
-      </p:sp>
-      <p:sp>
-        <p:nvSpPr>
-          <p:cNvPr id="302" name="Stat 1"/>
-          <p:cNvSpPr/>
-          <p:nvPr/>
-        </p:nvSpPr>
-        <p:spPr>
-          <a:xfrm>
-            <a:off x="5715000" y="1097280"/>
-            <a:ext cx="3154680" cy="1097280"/>
-          </a:xfrm>
-          <a:prstGeom prst="roundRect">
-            <a:avLst>
-              <a:gd name="adj" fmla="val 6000"/>
-            </a:avLst>
-          </a:prstGeom>
-          <a:solidFill>
-            <a:srgbClr val="F3F3F3"/>
-          </a:solidFill>
-          <a:ln>
-            <a:noFill/>
-          </a:ln>
-        </p:spPr>
-        <p:txBody>
-          <a:bodyPr spcFirstLastPara="1" wrap="square" lIns="182880" tIns="73152" rIns="137160" bIns="73152" anchor="ctr" anchorCtr="0">
-            <a:noAutofit/>
-          </a:bodyPr>
-          <a:lstStyle/>
+              <a:t>It reads portfolios, mandates, market events and the RM's own notes. It gives back a ranked list of next actions: who to call, what to say and the proof behind it.</a:t>
+            </a:r>
+          </a:p>
           <a:p>
             <a:pPr marL="0" indent="0" algn="l">
               <a:spcBef>
                 <a:spcPts val="0"/>
               </a:spcBef>
               <a:spcAft>
-                <a:spcPts val="200"/>
-              </a:spcAft>
-              <a:buNone/>
-            </a:pPr>
-            <a:r>
-              <a:rPr lang="en-GB" sz="2800" b="1" dirty="0">
-                <a:solidFill>
-                  <a:srgbClr val="1A73E8"/>
+                <a:spcPts val="300"/>
+              </a:spcAft>
+              <a:buNone/>
+            </a:pPr>
+            <a:r>
+              <a:rPr lang="en-GB" sz="1400" b="1" dirty="0">
+                <a:solidFill>
+                  <a:srgbClr val="1F1F1F"/>
                 </a:solidFill>
                 <a:latin typeface="Google Sans Flex"/>
                 <a:ea typeface="Google Sans Flex"/>
                 <a:cs typeface="Google Sans Flex"/>
                 <a:sym typeface="Google Sans Flex"/>
               </a:rPr>
-              <a:t>20</a:t>
+              <a:t>Who stays in charge</a:t>
             </a:r>
           </a:p>
           <a:p>
@@ -8316,70 +8377,37 @@
               <a:buNone/>
             </a:pPr>
             <a:r>
-              <a:rPr lang="en-GB" sz="1200" dirty="0">
-                <a:solidFill>
-                  <a:srgbClr val="5F6368"/>
+              <a:rPr lang="en-GB" sz="1300" dirty="0">
+                <a:solidFill>
+                  <a:srgbClr val="1F1F1F"/>
                 </a:solidFill>
                 <a:latin typeface="Google Sans Flex"/>
                 <a:ea typeface="Google Sans Flex"/>
                 <a:cs typeface="Google Sans Flex"/>
                 <a:sym typeface="Google Sans Flex"/>
               </a:rPr>
-              <a:t>clients in one RM's book</a:t>
-            </a:r>
-          </a:p>
-        </p:txBody>
-      </p:sp>
-      <p:sp>
-        <p:nvSpPr>
-          <p:cNvPr id="303" name="Stat 2"/>
-          <p:cNvSpPr/>
-          <p:nvPr/>
-        </p:nvSpPr>
-        <p:spPr>
-          <a:xfrm>
-            <a:off x="5715000" y="2359152"/>
-            <a:ext cx="3154680" cy="1097280"/>
-          </a:xfrm>
-          <a:prstGeom prst="roundRect">
-            <a:avLst>
-              <a:gd name="adj" fmla="val 6000"/>
-            </a:avLst>
-          </a:prstGeom>
-          <a:solidFill>
-            <a:srgbClr val="F3F3F3"/>
-          </a:solidFill>
-          <a:ln>
-            <a:noFill/>
-          </a:ln>
-        </p:spPr>
-        <p:txBody>
-          <a:bodyPr spcFirstLastPara="1" wrap="square" lIns="182880" tIns="73152" rIns="137160" bIns="73152" anchor="ctr" anchorCtr="0">
-            <a:noAutofit/>
-          </a:bodyPr>
-          <a:lstStyle/>
+              <a:t>The RM. She can inspect, question and overrule everything. The AI suggests. She decides.</a:t>
+            </a:r>
+          </a:p>
           <a:p>
             <a:pPr marL="0" indent="0" algn="l">
               <a:spcBef>
                 <a:spcPts val="0"/>
               </a:spcBef>
               <a:spcAft>
-                <a:spcPts val="200"/>
-              </a:spcAft>
-              <a:buNone/>
-            </a:pPr>
-            <a:r>
-              <a:rPr lang="en-GB" sz="2800" b="1" dirty="0">
-                <a:solidFill>
-                  <a:srgbClr val="188038"/>
-                </a:solidFill>
-                <a:latin typeface="Google Sans Flex"/>
-                <a:ea typeface="Google Sans Flex"/>
-                <a:cs typeface="Google Sans Flex"/>
-                <a:sym typeface="Google Sans Flex"/>
-              </a:rPr>
-              <a:t>USD 596.2m</a:t>
-            </a:r>
+                <a:spcPts val="0"/>
+              </a:spcAft>
+              <a:buNone/>
+            </a:pPr>
+            <a:endParaRPr lang="en-GB" sz="1300" dirty="0">
+              <a:solidFill>
+                <a:srgbClr val="1F1F1F"/>
+              </a:solidFill>
+              <a:latin typeface="Google Sans Flex"/>
+              <a:ea typeface="Google Sans Flex"/>
+              <a:cs typeface="Google Sans Flex"/>
+              <a:sym typeface="Google Sans Flex"/>
+            </a:endParaRPr>
           </a:p>
           <a:p>
             <a:pPr marL="0" indent="0" algn="l">
@@ -8391,94 +8419,34 @@
               </a:spcAft>
               <a:buNone/>
             </a:pPr>
-            <a:r>
-              <a:rPr lang="en-GB" sz="1200" dirty="0">
-                <a:solidFill>
-                  <a:srgbClr val="5F6368"/>
-                </a:solidFill>
-                <a:latin typeface="Google Sans Flex"/>
-                <a:ea typeface="Google Sans Flex"/>
-                <a:cs typeface="Google Sans Flex"/>
-                <a:sym typeface="Google Sans Flex"/>
-              </a:rPr>
-              <a:t>assets under management</a:t>
-            </a:r>
-          </a:p>
-        </p:txBody>
-      </p:sp>
-      <p:sp>
-        <p:nvSpPr>
-          <p:cNvPr id="304" name="Stat 3"/>
-          <p:cNvSpPr/>
-          <p:nvPr/>
-        </p:nvSpPr>
-        <p:spPr>
-          <a:xfrm>
-            <a:off x="5715000" y="3621024"/>
-            <a:ext cx="3154680" cy="1097280"/>
-          </a:xfrm>
-          <a:prstGeom prst="roundRect">
-            <a:avLst>
-              <a:gd name="adj" fmla="val 6000"/>
-            </a:avLst>
-          </a:prstGeom>
-          <a:solidFill>
-            <a:srgbClr val="F3F3F3"/>
-          </a:solidFill>
-          <a:ln>
-            <a:noFill/>
-          </a:ln>
-        </p:spPr>
-        <p:txBody>
-          <a:bodyPr spcFirstLastPara="1" wrap="square" lIns="182880" tIns="73152" rIns="137160" bIns="73152" anchor="ctr" anchorCtr="0">
-            <a:noAutofit/>
-          </a:bodyPr>
-          <a:lstStyle/>
-          <a:p>
-            <a:pPr marL="0" indent="0" algn="l">
-              <a:spcBef>
-                <a:spcPts val="0"/>
-              </a:spcBef>
-              <a:spcAft>
-                <a:spcPts val="200"/>
-              </a:spcAft>
-              <a:buNone/>
-            </a:pPr>
-            <a:r>
-              <a:rPr lang="en-GB" sz="2800" b="1" dirty="0">
-                <a:solidFill>
-                  <a:srgbClr val="E37400"/>
-                </a:solidFill>
-                <a:latin typeface="Google Sans Flex"/>
-                <a:ea typeface="Google Sans Flex"/>
-                <a:cs typeface="Google Sans Flex"/>
-                <a:sym typeface="Google Sans Flex"/>
-              </a:rPr>
-              <a:t>93</a:t>
-            </a:r>
-          </a:p>
-          <a:p>
-            <a:pPr marL="0" indent="0" algn="l">
-              <a:spcBef>
-                <a:spcPts val="0"/>
-              </a:spcBef>
-              <a:spcAft>
-                <a:spcPts val="0"/>
-              </a:spcAft>
-              <a:buNone/>
-            </a:pPr>
-            <a:r>
-              <a:rPr lang="en-GB" sz="1200" dirty="0">
-                <a:solidFill>
-                  <a:srgbClr val="5F6368"/>
-                </a:solidFill>
-                <a:latin typeface="Google Sans Flex"/>
-                <a:ea typeface="Google Sans Flex"/>
-                <a:cs typeface="Google Sans Flex"/>
-                <a:sym typeface="Google Sans Flex"/>
-              </a:rPr>
-              <a:t>ranked next actions, 40 of them high</a:t>
-            </a:r>
+            <a:endParaRPr lang="en-GB" sz="1300" dirty="0">
+              <a:solidFill>
+                <a:srgbClr val="1F1F1F"/>
+              </a:solidFill>
+              <a:latin typeface="Google Sans Flex"/>
+              <a:ea typeface="Google Sans Flex"/>
+              <a:cs typeface="Google Sans Flex"/>
+              <a:sym typeface="Google Sans Flex"/>
+            </a:endParaRPr>
+          </a:p>
+          <a:p>
+            <a:r>
+              <a:rPr lang="en-US" b="1" dirty="0" err="1"/>
+              <a:t>RMSignal</a:t>
+            </a:r>
+            <a:r>
+              <a:rPr lang="en-US" b="1" dirty="0"/>
+              <a:t> turns portfolio data into a short, ranked, explained to-do list, so the Relationship Manager knows who to call first, what to say, and why, with the proof one click away.</a:t>
+            </a:r>
+            <a:endParaRPr lang="en-GB" sz="1300" dirty="0">
+              <a:solidFill>
+                <a:srgbClr val="1F1F1F"/>
+              </a:solidFill>
+              <a:latin typeface="Google Sans Flex"/>
+              <a:ea typeface="Google Sans Flex"/>
+              <a:cs typeface="Google Sans Flex"/>
+              <a:sym typeface="Google Sans Flex"/>
+            </a:endParaRPr>
           </a:p>
         </p:txBody>
       </p:sp>
@@ -11353,7 +11321,30 @@
                 <a:cs typeface="Google Sans Flex"/>
                 <a:sym typeface="Google Sans Flex"/>
               </a:rPr>
-              <a:t>SQLite, 12 tables seeded from the dataset. Read-only.</a:t>
+              <a:t>Core Banking Systems, </a:t>
+            </a:r>
+          </a:p>
+          <a:p>
+            <a:pPr marL="0" indent="0" algn="l">
+              <a:spcBef>
+                <a:spcPts val="0"/>
+              </a:spcBef>
+              <a:spcAft>
+                <a:spcPts val="0"/>
+              </a:spcAft>
+              <a:buNone/>
+            </a:pPr>
+            <a:r>
+              <a:rPr lang="en-GB" sz="1050" dirty="0">
+                <a:solidFill>
+                  <a:srgbClr val="1F1F1F"/>
+                </a:solidFill>
+                <a:latin typeface="Google Sans Flex"/>
+                <a:ea typeface="Google Sans Flex"/>
+                <a:cs typeface="Google Sans Flex"/>
+                <a:sym typeface="Google Sans Flex"/>
+              </a:rPr>
+              <a:t>Events.</a:t>
             </a:r>
           </a:p>
         </p:txBody>
@@ -11745,7 +11736,7 @@
                 <a:cs typeface="Google Sans Flex"/>
                 <a:sym typeface="Google Sans Flex"/>
               </a:rPr>
-              <a:t>JSON files per date: reports, evidence, actions, overview, scenarios.</a:t>
+              <a:t>Database with reports, evidence, actions, overview, scenarios.</a:t>
             </a:r>
           </a:p>
         </p:txBody>
@@ -11919,7 +11910,7 @@
                 <a:cs typeface="Google Sans Flex"/>
                 <a:sym typeface="Google Sans Flex"/>
               </a:rPr>
-              <a:t>TanStack Start, React</a:t>
+              <a:t>API driven</a:t>
             </a:r>
           </a:p>
         </p:txBody>
@@ -12104,7 +12095,7 @@
                 <a:cs typeface="Google Sans Flex"/>
                 <a:sym typeface="Google Sans Flex"/>
               </a:rPr>
-              <a:t>policy checkpoints (mock engine)  |  audit log of every tool call  |  client names replaced before any model call  |  one fixed date per run, no look-ahead  |  KYC peer over A2A (mock)</a:t>
+              <a:t>policy checkpoints (mock engine)  |  audit log of every tool call  |  client names replaced before any model call  |  one fixed date per run, no look-ahead  |  KYC peer over A2A</a:t>
             </a:r>
           </a:p>
         </p:txBody>
@@ -12585,59 +12576,6 @@
       </p:sp>
       <p:sp>
         <p:nvSpPr>
-          <p:cNvPr id="366" name="Tech Pydantic"/>
-          <p:cNvSpPr/>
-          <p:nvPr/>
-        </p:nvSpPr>
-        <p:spPr>
-          <a:xfrm>
-            <a:off x="2093976" y="1920240"/>
-            <a:ext cx="1115568" cy="329184"/>
-          </a:xfrm>
-          <a:prstGeom prst="roundRect">
-            <a:avLst>
-              <a:gd name="adj" fmla="val 50000"/>
-            </a:avLst>
-          </a:prstGeom>
-          <a:solidFill>
-            <a:srgbClr val="E8F0FE"/>
-          </a:solidFill>
-          <a:ln>
-            <a:noFill/>
-          </a:ln>
-        </p:spPr>
-        <p:txBody>
-          <a:bodyPr spcFirstLastPara="1" wrap="square" lIns="45720" tIns="0" rIns="45720" bIns="0" anchor="ctr" anchorCtr="0">
-            <a:noAutofit/>
-          </a:bodyPr>
-          <a:lstStyle/>
-          <a:p>
-            <a:pPr marL="0" indent="0" algn="ctr">
-              <a:spcBef>
-                <a:spcPts val="0"/>
-              </a:spcBef>
-              <a:spcAft>
-                <a:spcPts val="0"/>
-              </a:spcAft>
-              <a:buNone/>
-            </a:pPr>
-            <a:r>
-              <a:rPr lang="en-GB" sz="1100" dirty="0">
-                <a:solidFill>
-                  <a:srgbClr val="1F1F1F"/>
-                </a:solidFill>
-                <a:latin typeface="Google Sans Flex"/>
-                <a:ea typeface="Google Sans Flex"/>
-                <a:cs typeface="Google Sans Flex"/>
-                <a:sym typeface="Google Sans Flex"/>
-              </a:rPr>
-              <a:t>Pydantic</a:t>
-            </a:r>
-          </a:p>
-        </p:txBody>
-      </p:sp>
-      <p:sp>
-        <p:nvSpPr>
           <p:cNvPr id="367" name="Group Data and analytics"/>
           <p:cNvSpPr txBox="1"/>
           <p:nvPr/>
@@ -12793,218 +12731,6 @@
       </p:sp>
       <p:sp>
         <p:nvSpPr>
-          <p:cNvPr id="370" name="Tech SQLite"/>
-          <p:cNvSpPr/>
-          <p:nvPr/>
-        </p:nvSpPr>
-        <p:spPr>
-          <a:xfrm>
-            <a:off x="4613148" y="2130552"/>
-            <a:ext cx="905256" cy="329184"/>
-          </a:xfrm>
-          <a:prstGeom prst="roundRect">
-            <a:avLst>
-              <a:gd name="adj" fmla="val 50000"/>
-            </a:avLst>
-          </a:prstGeom>
-          <a:solidFill>
-            <a:srgbClr val="E6F4EA"/>
-          </a:solidFill>
-          <a:ln>
-            <a:noFill/>
-          </a:ln>
-        </p:spPr>
-        <p:txBody>
-          <a:bodyPr spcFirstLastPara="1" wrap="square" lIns="45720" tIns="0" rIns="45720" bIns="0" anchor="ctr" anchorCtr="0">
-            <a:noAutofit/>
-          </a:bodyPr>
-          <a:lstStyle/>
-          <a:p>
-            <a:pPr marL="0" indent="0" algn="ctr">
-              <a:spcBef>
-                <a:spcPts val="0"/>
-              </a:spcBef>
-              <a:spcAft>
-                <a:spcPts val="0"/>
-              </a:spcAft>
-              <a:buNone/>
-            </a:pPr>
-            <a:r>
-              <a:rPr lang="en-GB" sz="1100" dirty="0">
-                <a:solidFill>
-                  <a:srgbClr val="1F1F1F"/>
-                </a:solidFill>
-                <a:latin typeface="Google Sans Flex"/>
-                <a:ea typeface="Google Sans Flex"/>
-                <a:cs typeface="Google Sans Flex"/>
-                <a:sym typeface="Google Sans Flex"/>
-              </a:rPr>
-              <a:t>SQLite</a:t>
-            </a:r>
-          </a:p>
-        </p:txBody>
-      </p:sp>
-      <p:sp>
-        <p:nvSpPr>
-          <p:cNvPr id="371" name="Tech FastAPI"/>
-          <p:cNvSpPr/>
-          <p:nvPr/>
-        </p:nvSpPr>
-        <p:spPr>
-          <a:xfrm>
-            <a:off x="5609844" y="2130552"/>
-            <a:ext cx="1010412" cy="329184"/>
-          </a:xfrm>
-          <a:prstGeom prst="roundRect">
-            <a:avLst>
-              <a:gd name="adj" fmla="val 50000"/>
-            </a:avLst>
-          </a:prstGeom>
-          <a:solidFill>
-            <a:srgbClr val="E6F4EA"/>
-          </a:solidFill>
-          <a:ln>
-            <a:noFill/>
-          </a:ln>
-        </p:spPr>
-        <p:txBody>
-          <a:bodyPr spcFirstLastPara="1" wrap="square" lIns="45720" tIns="0" rIns="45720" bIns="0" anchor="ctr" anchorCtr="0">
-            <a:noAutofit/>
-          </a:bodyPr>
-          <a:lstStyle/>
-          <a:p>
-            <a:pPr marL="0" indent="0" algn="ctr">
-              <a:spcBef>
-                <a:spcPts val="0"/>
-              </a:spcBef>
-              <a:spcAft>
-                <a:spcPts val="0"/>
-              </a:spcAft>
-              <a:buNone/>
-            </a:pPr>
-            <a:r>
-              <a:rPr lang="en-GB" sz="1100" dirty="0">
-                <a:solidFill>
-                  <a:srgbClr val="1F1F1F"/>
-                </a:solidFill>
-                <a:latin typeface="Google Sans Flex"/>
-                <a:ea typeface="Google Sans Flex"/>
-                <a:cs typeface="Google Sans Flex"/>
-                <a:sym typeface="Google Sans Flex"/>
-              </a:rPr>
-              <a:t>FastAPI</a:t>
-            </a:r>
-          </a:p>
-        </p:txBody>
-      </p:sp>
-      <p:sp>
-        <p:nvSpPr>
-          <p:cNvPr id="372" name="Tech Uvicorn"/>
-          <p:cNvSpPr/>
-          <p:nvPr/>
-        </p:nvSpPr>
-        <p:spPr>
-          <a:xfrm>
-            <a:off x="6711696" y="2130552"/>
-            <a:ext cx="1010412" cy="329184"/>
-          </a:xfrm>
-          <a:prstGeom prst="roundRect">
-            <a:avLst>
-              <a:gd name="adj" fmla="val 50000"/>
-            </a:avLst>
-          </a:prstGeom>
-          <a:solidFill>
-            <a:srgbClr val="E6F4EA"/>
-          </a:solidFill>
-          <a:ln>
-            <a:noFill/>
-          </a:ln>
-        </p:spPr>
-        <p:txBody>
-          <a:bodyPr spcFirstLastPara="1" wrap="square" lIns="45720" tIns="0" rIns="45720" bIns="0" anchor="ctr" anchorCtr="0">
-            <a:noAutofit/>
-          </a:bodyPr>
-          <a:lstStyle/>
-          <a:p>
-            <a:pPr marL="0" indent="0" algn="ctr">
-              <a:spcBef>
-                <a:spcPts val="0"/>
-              </a:spcBef>
-              <a:spcAft>
-                <a:spcPts val="0"/>
-              </a:spcAft>
-              <a:buNone/>
-            </a:pPr>
-            <a:r>
-              <a:rPr lang="en-GB" sz="1100" dirty="0">
-                <a:solidFill>
-                  <a:srgbClr val="1F1F1F"/>
-                </a:solidFill>
-                <a:latin typeface="Google Sans Flex"/>
-                <a:ea typeface="Google Sans Flex"/>
-                <a:cs typeface="Google Sans Flex"/>
-                <a:sym typeface="Google Sans Flex"/>
-              </a:rPr>
-              <a:t>Uvicorn</a:t>
-            </a:r>
-          </a:p>
-        </p:txBody>
-      </p:sp>
-      <p:sp>
-        <p:nvSpPr>
-          <p:cNvPr id="373" name="Tech uv"/>
-          <p:cNvSpPr/>
-          <p:nvPr/>
-        </p:nvSpPr>
-        <p:spPr>
-          <a:xfrm>
-            <a:off x="7813548" y="2130552"/>
-            <a:ext cx="484632" cy="329184"/>
-          </a:xfrm>
-          <a:prstGeom prst="roundRect">
-            <a:avLst>
-              <a:gd name="adj" fmla="val 50000"/>
-            </a:avLst>
-          </a:prstGeom>
-          <a:solidFill>
-            <a:srgbClr val="E6F4EA"/>
-          </a:solidFill>
-          <a:ln>
-            <a:noFill/>
-          </a:ln>
-        </p:spPr>
-        <p:txBody>
-          <a:bodyPr spcFirstLastPara="1" wrap="square" lIns="45720" tIns="0" rIns="45720" bIns="0" anchor="ctr" anchorCtr="0">
-            <a:noAutofit/>
-          </a:bodyPr>
-          <a:lstStyle/>
-          <a:p>
-            <a:pPr marL="0" indent="0" algn="ctr">
-              <a:spcBef>
-                <a:spcPts val="0"/>
-              </a:spcBef>
-              <a:spcAft>
-                <a:spcPts val="0"/>
-              </a:spcAft>
-              <a:buNone/>
-            </a:pPr>
-            <a:r>
-              <a:rPr lang="en-GB" sz="1100" dirty="0">
-                <a:solidFill>
-                  <a:srgbClr val="1F1F1F"/>
-                </a:solidFill>
-                <a:latin typeface="Google Sans Flex"/>
-                <a:ea typeface="Google Sans Flex"/>
-                <a:cs typeface="Google Sans Flex"/>
-                <a:sym typeface="Google Sans Flex"/>
-              </a:rPr>
-              <a:t>uv</a:t>
-            </a:r>
-          </a:p>
-        </p:txBody>
-      </p:sp>
-      <p:sp>
-        <p:nvSpPr>
           <p:cNvPr id="374" name="Group Dashboard"/>
           <p:cNvSpPr txBox="1"/>
           <p:nvPr/>
@@ -13824,18 +13550,15 @@
               </a:spcAft>
               <a:buNone/>
             </a:pPr>
-            <a:r>
-              <a:rPr lang="en-GB" sz="1150" i="1" dirty="0">
-                <a:solidFill>
-                  <a:srgbClr val="5F6368"/>
-                </a:solidFill>
-                <a:latin typeface="Google Sans Flex"/>
-                <a:ea typeface="Google Sans Flex"/>
-                <a:cs typeface="Google Sans Flex"/>
-                <a:sym typeface="Google Sans Flex"/>
-              </a:rPr>
-              <a:t>The demo run used DeepSeek v4.1 Flash through a gateway. A bank can point the same code at its own private model.</a:t>
-            </a:r>
+            <a:endParaRPr lang="en-GB" sz="1150" i="1" dirty="0">
+              <a:solidFill>
+                <a:srgbClr val="5F6368"/>
+              </a:solidFill>
+              <a:latin typeface="Google Sans Flex"/>
+              <a:ea typeface="Google Sans Flex"/>
+              <a:cs typeface="Google Sans Flex"/>
+              <a:sym typeface="Google Sans Flex"/>
+            </a:endParaRPr>
           </a:p>
         </p:txBody>
       </p:sp>
@@ -14511,7 +14234,7 @@
                 <a:cs typeface="Google Sans Flex"/>
                 <a:sym typeface="Google Sans Flex"/>
               </a:rPr>
-              <a:t>846</a:t>
+              <a:t>846+</a:t>
             </a:r>
           </a:p>
           <a:p>
